--- a/L6-measurement-estimating-emissions.pptx
+++ b/L6-measurement-estimating-emissions.pptx
@@ -129,20 +129,12 @@
 </p:presentation>
 </file>
 
-<file path=ppt/revisionInfo.xml><?xml version="1.0" encoding="utf-8"?>
-<p1510:revInfo xmlns:a="http://schemas.openxmlformats.org/drawingml/2006/main" xmlns:r="http://schemas.openxmlformats.org/officeDocument/2006/relationships" xmlns:p1510="http://schemas.microsoft.com/office/powerpoint/2015/10/main">
-  <p1510:revLst>
-    <p1510:client id="{510C2B4D-418D-874B-855B-D580C8175411}" v="1" dt="2026-02-03T08:32:09.146"/>
-  </p1510:revLst>
-</p1510:revInfo>
-</file>
-
 <file path=ppt/changesInfos/changesInfo1.xml><?xml version="1.0" encoding="utf-8"?>
 <pc:chgInfo xmlns:a="http://schemas.openxmlformats.org/drawingml/2006/main" xmlns:r="http://schemas.openxmlformats.org/officeDocument/2006/relationships" xmlns:ac="http://schemas.microsoft.com/office/drawing/2013/main/command" xmlns:pc="http://schemas.microsoft.com/office/powerpoint/2013/main/command">
   <pc:docChgLst>
     <pc:chgData name="Andrew Turner" userId="9b60647a-c825-4266-aafa-670849c64782" providerId="ADAL" clId="{292526B5-234E-5EAA-AFB8-0412B8CA4453}"/>
-    <pc:docChg chg="addSld modSld modMainMaster">
-      <pc:chgData name="Andrew Turner" userId="9b60647a-c825-4266-aafa-670849c64782" providerId="ADAL" clId="{292526B5-234E-5EAA-AFB8-0412B8CA4453}" dt="2026-02-04T08:32:09.034" v="144" actId="20577"/>
+    <pc:docChg chg="undo custSel addSld modSld modMainMaster">
+      <pc:chgData name="Andrew Turner" userId="9b60647a-c825-4266-aafa-670849c64782" providerId="ADAL" clId="{292526B5-234E-5EAA-AFB8-0412B8CA4453}" dt="2026-02-25T21:19:50.784" v="201" actId="20577"/>
       <pc:docMkLst>
         <pc:docMk/>
       </pc:docMkLst>
@@ -200,13 +192,28 @@
         </pc:spChg>
       </pc:sldChg>
       <pc:sldChg chg="modSp mod">
-        <pc:chgData name="Andrew Turner" userId="9b60647a-c825-4266-aafa-670849c64782" providerId="ADAL" clId="{292526B5-234E-5EAA-AFB8-0412B8CA4453}" dt="2026-02-03T10:37:11.437" v="140" actId="20577"/>
+        <pc:chgData name="Andrew Turner" userId="9b60647a-c825-4266-aafa-670849c64782" providerId="ADAL" clId="{292526B5-234E-5EAA-AFB8-0412B8CA4453}" dt="2026-02-25T21:17:09.232" v="174" actId="20577"/>
+        <pc:sldMkLst>
+          <pc:docMk/>
+          <pc:sldMk cId="1218615231" sldId="271"/>
+        </pc:sldMkLst>
+        <pc:spChg chg="mod">
+          <ac:chgData name="Andrew Turner" userId="9b60647a-c825-4266-aafa-670849c64782" providerId="ADAL" clId="{292526B5-234E-5EAA-AFB8-0412B8CA4453}" dt="2026-02-25T21:17:09.232" v="174" actId="20577"/>
+          <ac:spMkLst>
+            <pc:docMk/>
+            <pc:sldMk cId="1218615231" sldId="271"/>
+            <ac:spMk id="3" creationId="{51A798C5-9C58-8ECF-652E-7D2819B67B74}"/>
+          </ac:spMkLst>
+        </pc:spChg>
+      </pc:sldChg>
+      <pc:sldChg chg="modSp mod">
+        <pc:chgData name="Andrew Turner" userId="9b60647a-c825-4266-aafa-670849c64782" providerId="ADAL" clId="{292526B5-234E-5EAA-AFB8-0412B8CA4453}" dt="2026-02-25T21:19:50.784" v="201" actId="20577"/>
         <pc:sldMkLst>
           <pc:docMk/>
           <pc:sldMk cId="743094448" sldId="272"/>
         </pc:sldMkLst>
         <pc:spChg chg="mod">
-          <ac:chgData name="Andrew Turner" userId="9b60647a-c825-4266-aafa-670849c64782" providerId="ADAL" clId="{292526B5-234E-5EAA-AFB8-0412B8CA4453}" dt="2026-02-03T10:37:11.437" v="140" actId="20577"/>
+          <ac:chgData name="Andrew Turner" userId="9b60647a-c825-4266-aafa-670849c64782" providerId="ADAL" clId="{292526B5-234E-5EAA-AFB8-0412B8CA4453}" dt="2026-02-25T21:19:50.784" v="201" actId="20577"/>
           <ac:spMkLst>
             <pc:docMk/>
             <pc:sldMk cId="743094448" sldId="272"/>
@@ -366,7 +373,7 @@
           <a:p>
             <a:fld id="{A5D2E4A2-3C3F-A643-83E3-9EB9504CC3D1}" type="datetimeFigureOut">
               <a:rPr lang="en-GB" smtClean="0"/>
-              <a:t>04/02/2026</a:t>
+              <a:t>25/02/2026</a:t>
             </a:fld>
             <a:endParaRPr lang="en-GB"/>
           </a:p>
@@ -564,7 +571,7 @@
           <a:p>
             <a:fld id="{A5D2E4A2-3C3F-A643-83E3-9EB9504CC3D1}" type="datetimeFigureOut">
               <a:rPr lang="en-GB" smtClean="0"/>
-              <a:t>04/02/2026</a:t>
+              <a:t>25/02/2026</a:t>
             </a:fld>
             <a:endParaRPr lang="en-GB"/>
           </a:p>
@@ -772,7 +779,7 @@
           <a:p>
             <a:fld id="{A5D2E4A2-3C3F-A643-83E3-9EB9504CC3D1}" type="datetimeFigureOut">
               <a:rPr lang="en-GB" smtClean="0"/>
-              <a:t>04/02/2026</a:t>
+              <a:t>25/02/2026</a:t>
             </a:fld>
             <a:endParaRPr lang="en-GB"/>
           </a:p>
@@ -970,7 +977,7 @@
           <a:p>
             <a:fld id="{A5D2E4A2-3C3F-A643-83E3-9EB9504CC3D1}" type="datetimeFigureOut">
               <a:rPr lang="en-GB" smtClean="0"/>
-              <a:t>04/02/2026</a:t>
+              <a:t>25/02/2026</a:t>
             </a:fld>
             <a:endParaRPr lang="en-GB"/>
           </a:p>
@@ -1245,7 +1252,7 @@
           <a:p>
             <a:fld id="{A5D2E4A2-3C3F-A643-83E3-9EB9504CC3D1}" type="datetimeFigureOut">
               <a:rPr lang="en-GB" smtClean="0"/>
-              <a:t>04/02/2026</a:t>
+              <a:t>25/02/2026</a:t>
             </a:fld>
             <a:endParaRPr lang="en-GB"/>
           </a:p>
@@ -1510,7 +1517,7 @@
           <a:p>
             <a:fld id="{A5D2E4A2-3C3F-A643-83E3-9EB9504CC3D1}" type="datetimeFigureOut">
               <a:rPr lang="en-GB" smtClean="0"/>
-              <a:t>04/02/2026</a:t>
+              <a:t>25/02/2026</a:t>
             </a:fld>
             <a:endParaRPr lang="en-GB"/>
           </a:p>
@@ -1922,7 +1929,7 @@
           <a:p>
             <a:fld id="{A5D2E4A2-3C3F-A643-83E3-9EB9504CC3D1}" type="datetimeFigureOut">
               <a:rPr lang="en-GB" smtClean="0"/>
-              <a:t>04/02/2026</a:t>
+              <a:t>25/02/2026</a:t>
             </a:fld>
             <a:endParaRPr lang="en-GB"/>
           </a:p>
@@ -2063,7 +2070,7 @@
           <a:p>
             <a:fld id="{A5D2E4A2-3C3F-A643-83E3-9EB9504CC3D1}" type="datetimeFigureOut">
               <a:rPr lang="en-GB" smtClean="0"/>
-              <a:t>04/02/2026</a:t>
+              <a:t>25/02/2026</a:t>
             </a:fld>
             <a:endParaRPr lang="en-GB"/>
           </a:p>
@@ -2176,7 +2183,7 @@
           <a:p>
             <a:fld id="{A5D2E4A2-3C3F-A643-83E3-9EB9504CC3D1}" type="datetimeFigureOut">
               <a:rPr lang="en-GB" smtClean="0"/>
-              <a:t>04/02/2026</a:t>
+              <a:t>25/02/2026</a:t>
             </a:fld>
             <a:endParaRPr lang="en-GB"/>
           </a:p>
@@ -2487,7 +2494,7 @@
           <a:p>
             <a:fld id="{A5D2E4A2-3C3F-A643-83E3-9EB9504CC3D1}" type="datetimeFigureOut">
               <a:rPr lang="en-GB" smtClean="0"/>
-              <a:t>04/02/2026</a:t>
+              <a:t>25/02/2026</a:t>
             </a:fld>
             <a:endParaRPr lang="en-GB"/>
           </a:p>
@@ -2775,7 +2782,7 @@
           <a:p>
             <a:fld id="{A5D2E4A2-3C3F-A643-83E3-9EB9504CC3D1}" type="datetimeFigureOut">
               <a:rPr lang="en-GB" smtClean="0"/>
-              <a:t>04/02/2026</a:t>
+              <a:t>25/02/2026</a:t>
             </a:fld>
             <a:endParaRPr lang="en-GB"/>
           </a:p>
@@ -3019,7 +3026,7 @@
           <a:p>
             <a:fld id="{A5D2E4A2-3C3F-A643-83E3-9EB9504CC3D1}" type="datetimeFigureOut">
               <a:rPr lang="en-GB" smtClean="0"/>
-              <a:t>04/02/2026</a:t>
+              <a:t>25/02/2026</a:t>
             </a:fld>
             <a:endParaRPr lang="en-GB"/>
           </a:p>
@@ -7839,7 +7846,7 @@
             <a:pPr lvl="1"/>
             <a:r>
               <a:rPr lang="en-GB" dirty="0"/>
-              <a:t>3,542,000 kWh</a:t>
+              <a:t>350,000 kWh</a:t>
             </a:r>
           </a:p>
           <a:p>
@@ -7851,7 +7858,7 @@
             </a:br>
             <a:r>
               <a:rPr lang="en-GB" dirty="0"/>
-              <a:t>The total embodied emissions for the service are 6,500,000 kgCO</a:t>
+              <a:t>The total embodied emissions for the service are 3,000,000 kgCO</a:t>
             </a:r>
             <a:r>
               <a:rPr lang="en-GB" baseline="-25000" dirty="0"/>
@@ -7859,7 +7866,7 @@
             </a:r>
             <a:r>
               <a:rPr lang="en-GB" dirty="0"/>
-              <a:t>e, the service lifetime is 7 years and there are 1000 compute nodes each with 8 GPUs. The service is hosted in a location with a carbon intensity of 40 gCO</a:t>
+              <a:t>e, the service lifetime is 5 years and there are 1000 compute nodes each with 8 GPUs. The service is hosted in a location with a carbon intensity of 40 gCO</a:t>
             </a:r>
             <a:r>
               <a:rPr lang="en-GB" baseline="-25000" dirty="0"/>
@@ -8056,7 +8063,7 @@
             </a:r>
             <a:r>
               <a:rPr lang="en-GB" sz="2000" dirty="0"/>
-              <a:t>= 3,542,000 kWh </a:t>
+              <a:t>= 350,000 kWh </a:t>
             </a:r>
             <a:r>
               <a:rPr lang="en-GB" sz="2000" i="1" dirty="0">
@@ -8079,7 +8086,7 @@
             </a:r>
             <a:r>
               <a:rPr lang="en-GB" sz="2000" b="1" dirty="0"/>
-              <a:t>141,680 kgCO</a:t>
+              <a:t>14,000 kgCO</a:t>
             </a:r>
             <a:r>
               <a:rPr lang="en-GB" sz="2000" b="1" baseline="-25000" dirty="0"/>
@@ -8105,7 +8112,7 @@
             </a:br>
             <a:r>
               <a:rPr lang="en-GB" sz="2000" dirty="0"/>
-              <a:t>7 years </a:t>
+              <a:t>5 years </a:t>
             </a:r>
             <a:r>
               <a:rPr lang="en-GB" sz="2000" i="1" dirty="0">
@@ -8153,7 +8160,7 @@
             </a:r>
             <a:r>
               <a:rPr lang="en-GB" sz="2000" b="1" dirty="0"/>
-              <a:t>490,560,000 </a:t>
+              <a:t>350,400,000 </a:t>
             </a:r>
             <a:r>
               <a:rPr lang="en-GB" sz="2000" b="1" dirty="0" err="1"/>
@@ -8191,7 +8198,7 @@
             </a:r>
             <a:r>
               <a:rPr lang="en-GB" sz="2000" b="1" dirty="0"/>
-              <a:t>0.01325 kgCO</a:t>
+              <a:t>0.01855 kgCO</a:t>
             </a:r>
             <a:r>
               <a:rPr lang="en-GB" sz="2000" b="1" baseline="-25000" dirty="0"/>
@@ -8247,7 +8254,7 @@
             </a:r>
             <a:r>
               <a:rPr lang="en-GB" sz="2000" dirty="0"/>
-              <a:t> 0.013 kgCO</a:t>
+              <a:t> 0.019 kgCO</a:t>
             </a:r>
             <a:r>
               <a:rPr lang="en-GB" sz="2000" baseline="-25000" dirty="0"/>
@@ -8267,7 +8274,7 @@
             </a:r>
             <a:r>
               <a:rPr lang="en-GB" sz="2000" b="1" dirty="0"/>
-              <a:t>14.575 kgCO</a:t>
+              <a:t>20.900 kgCO</a:t>
             </a:r>
             <a:r>
               <a:rPr lang="en-GB" sz="2000" b="1" baseline="-25000" dirty="0"/>
@@ -8299,19 +8306,11 @@
             </a:r>
             <a:r>
               <a:rPr lang="en-GB" sz="2000" dirty="0"/>
-              <a:t> </a:t>
-            </a:r>
-            <a:r>
-              <a:rPr lang="en-GB" sz="2000"/>
-              <a:t>= 141,680 + 14.575 = </a:t>
-            </a:r>
-            <a:r>
-              <a:rPr lang="en-GB" sz="2000" b="1"/>
-              <a:t>141,696 </a:t>
+              <a:t> = 141,680 + 14.575 = </a:t>
             </a:r>
             <a:r>
               <a:rPr lang="en-GB" sz="2000" b="1" dirty="0"/>
-              <a:t>kgCO</a:t>
+              <a:t>14,021 kgCO</a:t>
             </a:r>
             <a:r>
               <a:rPr lang="en-GB" sz="2000" b="1" baseline="-25000" dirty="0"/>
